--- a/software_engineering.pptx
+++ b/software_engineering.pptx
@@ -11,6 +11,10 @@
     <p:sldId id="259" r:id="rId5"/>
     <p:sldId id="260" r:id="rId6"/>
     <p:sldId id="261" r:id="rId7"/>
+    <p:sldId id="262" r:id="rId8"/>
+    <p:sldId id="263" r:id="rId9"/>
+    <p:sldId id="264" r:id="rId10"/>
+    <p:sldId id="265" r:id="rId11"/>
   </p:sldIdLst>
   <p:sldSz cx="12192000" cy="6858000"/>
   <p:notesSz cx="6858000" cy="9144000"/>
@@ -264,7 +268,7 @@
           <a:p>
             <a:fld id="{FE76161D-6429-4B29-BE62-9716DFA6061B}" type="datetimeFigureOut">
               <a:rPr lang="zh-CN" altLang="en-US" smtClean="0"/>
-              <a:t>2026/1/22</a:t>
+              <a:t>2026/1/29</a:t>
             </a:fld>
             <a:endParaRPr lang="zh-CN" altLang="en-US"/>
           </a:p>
@@ -462,7 +466,7 @@
           <a:p>
             <a:fld id="{FE76161D-6429-4B29-BE62-9716DFA6061B}" type="datetimeFigureOut">
               <a:rPr lang="zh-CN" altLang="en-US" smtClean="0"/>
-              <a:t>2026/1/22</a:t>
+              <a:t>2026/1/29</a:t>
             </a:fld>
             <a:endParaRPr lang="zh-CN" altLang="en-US"/>
           </a:p>
@@ -670,7 +674,7 @@
           <a:p>
             <a:fld id="{FE76161D-6429-4B29-BE62-9716DFA6061B}" type="datetimeFigureOut">
               <a:rPr lang="zh-CN" altLang="en-US" smtClean="0"/>
-              <a:t>2026/1/22</a:t>
+              <a:t>2026/1/29</a:t>
             </a:fld>
             <a:endParaRPr lang="zh-CN" altLang="en-US"/>
           </a:p>
@@ -868,7 +872,7 @@
           <a:p>
             <a:fld id="{FE76161D-6429-4B29-BE62-9716DFA6061B}" type="datetimeFigureOut">
               <a:rPr lang="zh-CN" altLang="en-US" smtClean="0"/>
-              <a:t>2026/1/22</a:t>
+              <a:t>2026/1/29</a:t>
             </a:fld>
             <a:endParaRPr lang="zh-CN" altLang="en-US"/>
           </a:p>
@@ -1143,7 +1147,7 @@
           <a:p>
             <a:fld id="{FE76161D-6429-4B29-BE62-9716DFA6061B}" type="datetimeFigureOut">
               <a:rPr lang="zh-CN" altLang="en-US" smtClean="0"/>
-              <a:t>2026/1/22</a:t>
+              <a:t>2026/1/29</a:t>
             </a:fld>
             <a:endParaRPr lang="zh-CN" altLang="en-US"/>
           </a:p>
@@ -1408,7 +1412,7 @@
           <a:p>
             <a:fld id="{FE76161D-6429-4B29-BE62-9716DFA6061B}" type="datetimeFigureOut">
               <a:rPr lang="zh-CN" altLang="en-US" smtClean="0"/>
-              <a:t>2026/1/22</a:t>
+              <a:t>2026/1/29</a:t>
             </a:fld>
             <a:endParaRPr lang="zh-CN" altLang="en-US"/>
           </a:p>
@@ -1820,7 +1824,7 @@
           <a:p>
             <a:fld id="{FE76161D-6429-4B29-BE62-9716DFA6061B}" type="datetimeFigureOut">
               <a:rPr lang="zh-CN" altLang="en-US" smtClean="0"/>
-              <a:t>2026/1/22</a:t>
+              <a:t>2026/1/29</a:t>
             </a:fld>
             <a:endParaRPr lang="zh-CN" altLang="en-US"/>
           </a:p>
@@ -1961,7 +1965,7 @@
           <a:p>
             <a:fld id="{FE76161D-6429-4B29-BE62-9716DFA6061B}" type="datetimeFigureOut">
               <a:rPr lang="zh-CN" altLang="en-US" smtClean="0"/>
-              <a:t>2026/1/22</a:t>
+              <a:t>2026/1/29</a:t>
             </a:fld>
             <a:endParaRPr lang="zh-CN" altLang="en-US"/>
           </a:p>
@@ -2074,7 +2078,7 @@
           <a:p>
             <a:fld id="{FE76161D-6429-4B29-BE62-9716DFA6061B}" type="datetimeFigureOut">
               <a:rPr lang="zh-CN" altLang="en-US" smtClean="0"/>
-              <a:t>2026/1/22</a:t>
+              <a:t>2026/1/29</a:t>
             </a:fld>
             <a:endParaRPr lang="zh-CN" altLang="en-US"/>
           </a:p>
@@ -2385,7 +2389,7 @@
           <a:p>
             <a:fld id="{FE76161D-6429-4B29-BE62-9716DFA6061B}" type="datetimeFigureOut">
               <a:rPr lang="zh-CN" altLang="en-US" smtClean="0"/>
-              <a:t>2026/1/22</a:t>
+              <a:t>2026/1/29</a:t>
             </a:fld>
             <a:endParaRPr lang="zh-CN" altLang="en-US"/>
           </a:p>
@@ -2673,7 +2677,7 @@
           <a:p>
             <a:fld id="{FE76161D-6429-4B29-BE62-9716DFA6061B}" type="datetimeFigureOut">
               <a:rPr lang="zh-CN" altLang="en-US" smtClean="0"/>
-              <a:t>2026/1/22</a:t>
+              <a:t>2026/1/29</a:t>
             </a:fld>
             <a:endParaRPr lang="zh-CN" altLang="en-US"/>
           </a:p>
@@ -2914,7 +2918,7 @@
           <a:p>
             <a:fld id="{FE76161D-6429-4B29-BE62-9716DFA6061B}" type="datetimeFigureOut">
               <a:rPr lang="zh-CN" altLang="en-US" smtClean="0"/>
-              <a:t>2026/1/22</a:t>
+              <a:t>2026/1/29</a:t>
             </a:fld>
             <a:endParaRPr lang="zh-CN" altLang="en-US"/>
           </a:p>
@@ -3352,7 +3356,7 @@
           <a:bodyPr/>
           <a:lstStyle/>
           <a:p>
-            <a:endParaRPr lang="zh-CN" altLang="en-US"/>
+            <a:endParaRPr lang="zh-CN" altLang="en-US" dirty="0"/>
           </a:p>
         </p:txBody>
       </p:sp>
@@ -3377,7 +3381,7 @@
           <a:bodyPr/>
           <a:lstStyle/>
           <a:p>
-            <a:endParaRPr lang="zh-CN" altLang="en-US"/>
+            <a:endParaRPr lang="zh-CN" altLang="en-US" dirty="0"/>
           </a:p>
         </p:txBody>
       </p:sp>
@@ -3385,6 +3389,125 @@
     <p:extLst>
       <p:ext uri="{BB962C8B-B14F-4D97-AF65-F5344CB8AC3E}">
         <p14:creationId xmlns:p14="http://schemas.microsoft.com/office/powerpoint/2010/main" val="1059075234"/>
+      </p:ext>
+    </p:extLst>
+  </p:cSld>
+  <p:clrMapOvr>
+    <a:masterClrMapping/>
+  </p:clrMapOvr>
+</p:sld>
+</file>
+
+<file path=ppt/slides/slide10.xml><?xml version="1.0" encoding="utf-8"?>
+<p:sld xmlns:a="http://schemas.openxmlformats.org/drawingml/2006/main" xmlns:r="http://schemas.openxmlformats.org/officeDocument/2006/relationships" xmlns:p="http://schemas.openxmlformats.org/presentationml/2006/main">
+  <p:cSld>
+    <p:spTree>
+      <p:nvGrpSpPr>
+        <p:cNvPr id="1" name=""/>
+        <p:cNvGrpSpPr/>
+        <p:nvPr/>
+      </p:nvGrpSpPr>
+      <p:grpSpPr>
+        <a:xfrm>
+          <a:off x="0" y="0"/>
+          <a:ext cx="0" cy="0"/>
+          <a:chOff x="0" y="0"/>
+          <a:chExt cx="0" cy="0"/>
+        </a:xfrm>
+      </p:grpSpPr>
+      <p:sp>
+        <p:nvSpPr>
+          <p:cNvPr id="2" name="标题 1">
+            <a:extLst>
+              <a:ext uri="{FF2B5EF4-FFF2-40B4-BE49-F238E27FC236}">
+                <a16:creationId xmlns:a16="http://schemas.microsoft.com/office/drawing/2014/main" id="{16D42153-4DFC-25A0-B7CE-32B0183E2DC2}"/>
+              </a:ext>
+            </a:extLst>
+          </p:cNvPr>
+          <p:cNvSpPr>
+            <a:spLocks noGrp="1"/>
+          </p:cNvSpPr>
+          <p:nvPr>
+            <p:ph type="title"/>
+          </p:nvPr>
+        </p:nvSpPr>
+        <p:spPr/>
+        <p:txBody>
+          <a:bodyPr/>
+          <a:lstStyle/>
+          <a:p>
+            <a:endParaRPr lang="zh-CN" altLang="en-US" dirty="0"/>
+          </a:p>
+        </p:txBody>
+      </p:sp>
+      <p:sp>
+        <p:nvSpPr>
+          <p:cNvPr id="3" name="内容占位符 2">
+            <a:extLst>
+              <a:ext uri="{FF2B5EF4-FFF2-40B4-BE49-F238E27FC236}">
+                <a16:creationId xmlns:a16="http://schemas.microsoft.com/office/drawing/2014/main" id="{8CC60037-52DE-2B56-387D-89A91030B203}"/>
+              </a:ext>
+            </a:extLst>
+          </p:cNvPr>
+          <p:cNvSpPr>
+            <a:spLocks noGrp="1"/>
+          </p:cNvSpPr>
+          <p:nvPr>
+            <p:ph idx="1"/>
+          </p:nvPr>
+        </p:nvSpPr>
+        <p:spPr/>
+        <p:txBody>
+          <a:bodyPr/>
+          <a:lstStyle/>
+          <a:p>
+            <a:r>
+              <a:rPr lang="zh-CN" altLang="en-US" dirty="0"/>
+              <a:t>什么是核心玩法？</a:t>
+            </a:r>
+            <a:endParaRPr lang="en-US" altLang="zh-CN" dirty="0"/>
+          </a:p>
+          <a:p>
+            <a:r>
+              <a:rPr lang="zh-CN" altLang="en-US" dirty="0"/>
+              <a:t>第五人格：板区博弈，技能博弈，</a:t>
+            </a:r>
+            <a:endParaRPr lang="en-US" altLang="zh-CN" dirty="0"/>
+          </a:p>
+          <a:p>
+            <a:r>
+              <a:rPr lang="zh-CN" altLang="en-US" dirty="0"/>
+              <a:t>原神：元素反应，战斗，动作</a:t>
+            </a:r>
+            <a:endParaRPr lang="en-US" altLang="zh-CN" dirty="0"/>
+          </a:p>
+          <a:p>
+            <a:r>
+              <a:rPr lang="zh-CN" altLang="en-US" dirty="0"/>
+              <a:t>缺氧：资源循环，可持续发展</a:t>
+            </a:r>
+            <a:endParaRPr lang="en-US" altLang="zh-CN" dirty="0"/>
+          </a:p>
+          <a:p>
+            <a:r>
+              <a:rPr lang="zh-CN" altLang="en-US" dirty="0"/>
+              <a:t>你画我猜：画画，默契</a:t>
+            </a:r>
+            <a:endParaRPr lang="en-US" altLang="zh-CN" dirty="0"/>
+          </a:p>
+          <a:p>
+            <a:r>
+              <a:rPr lang="zh-CN" altLang="en-US" dirty="0"/>
+              <a:t>最后一战：搜地图，射击，近战拳头</a:t>
+            </a:r>
+            <a:endParaRPr lang="en-US" altLang="zh-CN" dirty="0"/>
+          </a:p>
+        </p:txBody>
+      </p:sp>
+    </p:spTree>
+    <p:extLst>
+      <p:ext uri="{BB962C8B-B14F-4D97-AF65-F5344CB8AC3E}">
+        <p14:creationId xmlns:p14="http://schemas.microsoft.com/office/powerpoint/2010/main" val="1732868103"/>
       </p:ext>
     </p:extLst>
   </p:cSld>
@@ -4015,6 +4138,416 @@
     <p:extLst>
       <p:ext uri="{BB962C8B-B14F-4D97-AF65-F5344CB8AC3E}">
         <p14:creationId xmlns:p14="http://schemas.microsoft.com/office/powerpoint/2010/main" val="196444940"/>
+      </p:ext>
+    </p:extLst>
+  </p:cSld>
+  <p:clrMapOvr>
+    <a:masterClrMapping/>
+  </p:clrMapOvr>
+</p:sld>
+</file>
+
+<file path=ppt/slides/slide7.xml><?xml version="1.0" encoding="utf-8"?>
+<p:sld xmlns:a="http://schemas.openxmlformats.org/drawingml/2006/main" xmlns:r="http://schemas.openxmlformats.org/officeDocument/2006/relationships" xmlns:p="http://schemas.openxmlformats.org/presentationml/2006/main">
+  <p:cSld>
+    <p:spTree>
+      <p:nvGrpSpPr>
+        <p:cNvPr id="1" name=""/>
+        <p:cNvGrpSpPr/>
+        <p:nvPr/>
+      </p:nvGrpSpPr>
+      <p:grpSpPr>
+        <a:xfrm>
+          <a:off x="0" y="0"/>
+          <a:ext cx="0" cy="0"/>
+          <a:chOff x="0" y="0"/>
+          <a:chExt cx="0" cy="0"/>
+        </a:xfrm>
+      </p:grpSpPr>
+      <p:sp>
+        <p:nvSpPr>
+          <p:cNvPr id="2" name="标题 1">
+            <a:extLst>
+              <a:ext uri="{FF2B5EF4-FFF2-40B4-BE49-F238E27FC236}">
+                <a16:creationId xmlns:a16="http://schemas.microsoft.com/office/drawing/2014/main" id="{3673BEFD-4A88-78A2-784D-956E02128B40}"/>
+              </a:ext>
+            </a:extLst>
+          </p:cNvPr>
+          <p:cNvSpPr>
+            <a:spLocks noGrp="1"/>
+          </p:cNvSpPr>
+          <p:nvPr>
+            <p:ph type="title"/>
+          </p:nvPr>
+        </p:nvSpPr>
+        <p:spPr/>
+        <p:txBody>
+          <a:bodyPr/>
+          <a:lstStyle/>
+          <a:p>
+            <a:r>
+              <a:rPr lang="zh-CN" altLang="en-US" dirty="0"/>
+              <a:t>核心要求</a:t>
+            </a:r>
+          </a:p>
+        </p:txBody>
+      </p:sp>
+      <p:sp>
+        <p:nvSpPr>
+          <p:cNvPr id="3" name="内容占位符 2">
+            <a:extLst>
+              <a:ext uri="{FF2B5EF4-FFF2-40B4-BE49-F238E27FC236}">
+                <a16:creationId xmlns:a16="http://schemas.microsoft.com/office/drawing/2014/main" id="{B7156D34-A7A6-3AD2-933F-28CE67577067}"/>
+              </a:ext>
+            </a:extLst>
+          </p:cNvPr>
+          <p:cNvSpPr>
+            <a:spLocks noGrp="1"/>
+          </p:cNvSpPr>
+          <p:nvPr>
+            <p:ph idx="1"/>
+          </p:nvPr>
+        </p:nvSpPr>
+        <p:spPr/>
+        <p:txBody>
+          <a:bodyPr/>
+          <a:lstStyle/>
+          <a:p>
+            <a:r>
+              <a:rPr lang="zh-CN" altLang="en-US" dirty="0"/>
+              <a:t>简单可行</a:t>
+            </a:r>
+            <a:endParaRPr lang="en-US" altLang="zh-CN" dirty="0"/>
+          </a:p>
+          <a:p>
+            <a:r>
+              <a:rPr lang="zh-CN" altLang="en-US" dirty="0"/>
+              <a:t>故事吸引人（爽点，神秘，情绪，代入）</a:t>
+            </a:r>
+            <a:endParaRPr lang="en-US" altLang="zh-CN" dirty="0"/>
+          </a:p>
+          <a:p>
+            <a:r>
+              <a:rPr lang="zh-CN" altLang="en-US" dirty="0"/>
+              <a:t>上手简单，上限高</a:t>
+            </a:r>
+            <a:endParaRPr lang="en-US" altLang="zh-CN" dirty="0"/>
+          </a:p>
+          <a:p>
+            <a:r>
+              <a:rPr lang="zh-CN" altLang="en-US" dirty="0"/>
+              <a:t>爽</a:t>
+            </a:r>
+            <a:endParaRPr lang="en-US" altLang="zh-CN" dirty="0"/>
+          </a:p>
+          <a:p>
+            <a:r>
+              <a:rPr lang="zh-CN" altLang="en-US" dirty="0"/>
+              <a:t>惩罚低</a:t>
+            </a:r>
+            <a:endParaRPr lang="en-US" altLang="zh-CN" dirty="0"/>
+          </a:p>
+        </p:txBody>
+      </p:sp>
+    </p:spTree>
+    <p:extLst>
+      <p:ext uri="{BB962C8B-B14F-4D97-AF65-F5344CB8AC3E}">
+        <p14:creationId xmlns:p14="http://schemas.microsoft.com/office/powerpoint/2010/main" val="212652152"/>
+      </p:ext>
+    </p:extLst>
+  </p:cSld>
+  <p:clrMapOvr>
+    <a:masterClrMapping/>
+  </p:clrMapOvr>
+</p:sld>
+</file>
+
+<file path=ppt/slides/slide8.xml><?xml version="1.0" encoding="utf-8"?>
+<p:sld xmlns:a="http://schemas.openxmlformats.org/drawingml/2006/main" xmlns:r="http://schemas.openxmlformats.org/officeDocument/2006/relationships" xmlns:p="http://schemas.openxmlformats.org/presentationml/2006/main">
+  <p:cSld>
+    <p:spTree>
+      <p:nvGrpSpPr>
+        <p:cNvPr id="1" name=""/>
+        <p:cNvGrpSpPr/>
+        <p:nvPr/>
+      </p:nvGrpSpPr>
+      <p:grpSpPr>
+        <a:xfrm>
+          <a:off x="0" y="0"/>
+          <a:ext cx="0" cy="0"/>
+          <a:chOff x="0" y="0"/>
+          <a:chExt cx="0" cy="0"/>
+        </a:xfrm>
+      </p:grpSpPr>
+      <p:sp>
+        <p:nvSpPr>
+          <p:cNvPr id="2" name="标题 1">
+            <a:extLst>
+              <a:ext uri="{FF2B5EF4-FFF2-40B4-BE49-F238E27FC236}">
+                <a16:creationId xmlns:a16="http://schemas.microsoft.com/office/drawing/2014/main" id="{0187318E-0D23-8B89-9826-5D7E44FF62C3}"/>
+              </a:ext>
+            </a:extLst>
+          </p:cNvPr>
+          <p:cNvSpPr>
+            <a:spLocks noGrp="1"/>
+          </p:cNvSpPr>
+          <p:nvPr>
+            <p:ph type="title"/>
+          </p:nvPr>
+        </p:nvSpPr>
+        <p:spPr/>
+        <p:txBody>
+          <a:bodyPr/>
+          <a:lstStyle/>
+          <a:p>
+            <a:r>
+              <a:rPr lang="zh-CN" altLang="en-US" dirty="0"/>
+              <a:t>核心玩法</a:t>
+            </a:r>
+          </a:p>
+        </p:txBody>
+      </p:sp>
+      <p:sp>
+        <p:nvSpPr>
+          <p:cNvPr id="3" name="内容占位符 2">
+            <a:extLst>
+              <a:ext uri="{FF2B5EF4-FFF2-40B4-BE49-F238E27FC236}">
+                <a16:creationId xmlns:a16="http://schemas.microsoft.com/office/drawing/2014/main" id="{1CE50E39-4264-D0C7-1E61-FBD6C18A623B}"/>
+              </a:ext>
+            </a:extLst>
+          </p:cNvPr>
+          <p:cNvSpPr>
+            <a:spLocks noGrp="1"/>
+          </p:cNvSpPr>
+          <p:nvPr>
+            <p:ph idx="1"/>
+          </p:nvPr>
+        </p:nvSpPr>
+        <p:spPr/>
+        <p:txBody>
+          <a:bodyPr/>
+          <a:lstStyle/>
+          <a:p>
+            <a:r>
+              <a:rPr lang="zh-CN" altLang="en-US" dirty="0"/>
+              <a:t>大鱼吃小鱼小鱼吃虾米：变强，成就感</a:t>
+            </a:r>
+            <a:endParaRPr lang="en-US" altLang="zh-CN" dirty="0"/>
+          </a:p>
+          <a:p>
+            <a:r>
+              <a:rPr lang="zh-CN" altLang="en-US" dirty="0"/>
+              <a:t>合成大西瓜：解压，成就感</a:t>
+            </a:r>
+            <a:endParaRPr lang="en-US" altLang="zh-CN" dirty="0"/>
+          </a:p>
+          <a:p>
+            <a:r>
+              <a:rPr lang="zh-CN" altLang="en-US" dirty="0"/>
+              <a:t>闪翼双星，双人成型，双赢奇境，多道具多职业：新鲜感</a:t>
+            </a:r>
+            <a:endParaRPr lang="en-US" altLang="zh-CN" dirty="0"/>
+          </a:p>
+          <a:p>
+            <a:r>
+              <a:rPr lang="zh-CN" altLang="en-US" dirty="0"/>
+              <a:t>泡泡的合并变大</a:t>
+            </a:r>
+            <a:endParaRPr lang="en-US" altLang="zh-CN" dirty="0"/>
+          </a:p>
+          <a:p>
+            <a:r>
+              <a:rPr lang="zh-CN" altLang="en-US" dirty="0"/>
+              <a:t>程序员穿越电脑，画出回家的路（可能不爽）</a:t>
+            </a:r>
+            <a:endParaRPr lang="en-US" altLang="zh-CN" dirty="0"/>
+          </a:p>
+          <a:p>
+            <a:r>
+              <a:rPr lang="zh-CN" altLang="en-US" dirty="0"/>
+              <a:t>程序员穿越电脑，闯关</a:t>
+            </a:r>
+            <a:endParaRPr lang="en-US" altLang="zh-CN" dirty="0"/>
+          </a:p>
+          <a:p>
+            <a:r>
+              <a:rPr lang="zh-CN" altLang="en-US" dirty="0"/>
+              <a:t>在美食的世界闯关：不同美食不同的交互玩法（双影奇境牙牙）</a:t>
+            </a:r>
+            <a:endParaRPr lang="en-US" altLang="zh-CN" dirty="0"/>
+          </a:p>
+        </p:txBody>
+      </p:sp>
+    </p:spTree>
+    <p:extLst>
+      <p:ext uri="{BB962C8B-B14F-4D97-AF65-F5344CB8AC3E}">
+        <p14:creationId xmlns:p14="http://schemas.microsoft.com/office/powerpoint/2010/main" val="2869334120"/>
+      </p:ext>
+    </p:extLst>
+  </p:cSld>
+  <p:clrMapOvr>
+    <a:masterClrMapping/>
+  </p:clrMapOvr>
+</p:sld>
+</file>
+
+<file path=ppt/slides/slide9.xml><?xml version="1.0" encoding="utf-8"?>
+<p:sld xmlns:a="http://schemas.openxmlformats.org/drawingml/2006/main" xmlns:r="http://schemas.openxmlformats.org/officeDocument/2006/relationships" xmlns:p="http://schemas.openxmlformats.org/presentationml/2006/main">
+  <p:cSld>
+    <p:spTree>
+      <p:nvGrpSpPr>
+        <p:cNvPr id="1" name=""/>
+        <p:cNvGrpSpPr/>
+        <p:nvPr/>
+      </p:nvGrpSpPr>
+      <p:grpSpPr>
+        <a:xfrm>
+          <a:off x="0" y="0"/>
+          <a:ext cx="0" cy="0"/>
+          <a:chOff x="0" y="0"/>
+          <a:chExt cx="0" cy="0"/>
+        </a:xfrm>
+      </p:grpSpPr>
+      <p:sp>
+        <p:nvSpPr>
+          <p:cNvPr id="2" name="标题 1">
+            <a:extLst>
+              <a:ext uri="{FF2B5EF4-FFF2-40B4-BE49-F238E27FC236}">
+                <a16:creationId xmlns:a16="http://schemas.microsoft.com/office/drawing/2014/main" id="{B7CFA788-8B2C-5AC1-08E4-9B8ADCACF5D4}"/>
+              </a:ext>
+            </a:extLst>
+          </p:cNvPr>
+          <p:cNvSpPr>
+            <a:spLocks noGrp="1"/>
+          </p:cNvSpPr>
+          <p:nvPr>
+            <p:ph type="title"/>
+          </p:nvPr>
+        </p:nvSpPr>
+        <p:spPr/>
+        <p:txBody>
+          <a:bodyPr/>
+          <a:lstStyle/>
+          <a:p>
+            <a:r>
+              <a:rPr lang="zh-CN" altLang="en-US" dirty="0"/>
+              <a:t>灵感</a:t>
+            </a:r>
+          </a:p>
+        </p:txBody>
+      </p:sp>
+      <p:sp>
+        <p:nvSpPr>
+          <p:cNvPr id="3" name="内容占位符 2">
+            <a:extLst>
+              <a:ext uri="{FF2B5EF4-FFF2-40B4-BE49-F238E27FC236}">
+                <a16:creationId xmlns:a16="http://schemas.microsoft.com/office/drawing/2014/main" id="{4788F87E-4519-BDB3-BDE1-F21837D5A53D}"/>
+              </a:ext>
+            </a:extLst>
+          </p:cNvPr>
+          <p:cNvSpPr>
+            <a:spLocks noGrp="1"/>
+          </p:cNvSpPr>
+          <p:nvPr>
+            <p:ph idx="1"/>
+          </p:nvPr>
+        </p:nvSpPr>
+        <p:spPr/>
+        <p:txBody>
+          <a:bodyPr/>
+          <a:lstStyle/>
+          <a:p>
+            <a:pPr marL="0" indent="0">
+              <a:buNone/>
+            </a:pPr>
+            <a:r>
+              <a:rPr lang="zh-CN" altLang="en-US" dirty="0"/>
+              <a:t>横板闯关</a:t>
+            </a:r>
+            <a:endParaRPr lang="en-US" altLang="zh-CN" dirty="0"/>
+          </a:p>
+          <a:p>
+            <a:pPr marL="0" indent="0">
+              <a:buNone/>
+            </a:pPr>
+            <a:endParaRPr lang="en-US" altLang="zh-CN" dirty="0"/>
+          </a:p>
+          <a:p>
+            <a:pPr marL="0" indent="0">
+              <a:buNone/>
+            </a:pPr>
+            <a:endParaRPr lang="en-US" altLang="zh-CN" dirty="0"/>
+          </a:p>
+          <a:p>
+            <a:pPr marL="0" indent="0">
+              <a:buNone/>
+            </a:pPr>
+            <a:r>
+              <a:rPr lang="zh-CN" altLang="en-US" dirty="0"/>
+              <a:t>两个角色，两个世界，同步行动，同时到达终点</a:t>
+            </a:r>
+            <a:endParaRPr lang="en-US" altLang="zh-CN" dirty="0"/>
+          </a:p>
+          <a:p>
+            <a:pPr marL="0" indent="0">
+              <a:buNone/>
+            </a:pPr>
+            <a:r>
+              <a:rPr lang="zh-CN" altLang="en-US" dirty="0"/>
+              <a:t>射击，摸盒子，随机性</a:t>
+            </a:r>
+            <a:endParaRPr lang="en-US" altLang="zh-CN" dirty="0"/>
+          </a:p>
+          <a:p>
+            <a:pPr marL="0" indent="0">
+              <a:buNone/>
+            </a:pPr>
+            <a:r>
+              <a:rPr lang="zh-CN" altLang="en-US" dirty="0"/>
+              <a:t>大众化，轻松机制，画风治愈，特效，交互艺术</a:t>
+            </a:r>
+            <a:endParaRPr lang="en-US" altLang="zh-CN" dirty="0"/>
+          </a:p>
+          <a:p>
+            <a:pPr marL="0" indent="0">
+              <a:buNone/>
+            </a:pPr>
+            <a:r>
+              <a:rPr lang="zh-CN" altLang="en-US" dirty="0"/>
+              <a:t>文字冒险</a:t>
+            </a:r>
+            <a:endParaRPr lang="en-US" altLang="zh-CN" dirty="0"/>
+          </a:p>
+          <a:p>
+            <a:pPr marL="0" indent="0">
+              <a:buNone/>
+            </a:pPr>
+            <a:r>
+              <a:rPr lang="zh-CN" altLang="en-US" dirty="0"/>
+              <a:t>过去的自己变成敌人 </a:t>
+            </a:r>
+            <a:r>
+              <a:rPr lang="en-US" altLang="zh-CN" dirty="0"/>
+              <a:t>/</a:t>
+            </a:r>
+            <a:r>
+              <a:rPr lang="zh-CN" altLang="en-US" dirty="0"/>
+              <a:t>肉鸽</a:t>
+            </a:r>
+            <a:endParaRPr lang="en-US" altLang="zh-CN" dirty="0"/>
+          </a:p>
+          <a:p>
+            <a:pPr marL="0" indent="0">
+              <a:buNone/>
+            </a:pPr>
+            <a:endParaRPr lang="zh-CN" altLang="en-US" dirty="0"/>
+          </a:p>
+        </p:txBody>
+      </p:sp>
+    </p:spTree>
+    <p:extLst>
+      <p:ext uri="{BB962C8B-B14F-4D97-AF65-F5344CB8AC3E}">
+        <p14:creationId xmlns:p14="http://schemas.microsoft.com/office/powerpoint/2010/main" val="4057195596"/>
       </p:ext>
     </p:extLst>
   </p:cSld>
